--- a/presentations/EDA03_heart_health.pptx
+++ b/presentations/EDA03_heart_health.pptx
@@ -14,6 +14,8 @@
     <p:sldId id="262" r:id="rId13"/>
     <p:sldId id="263" r:id="rId14"/>
     <p:sldId id="264" r:id="rId15"/>
+    <p:sldId id="265" r:id="rId16"/>
+    <p:sldId id="266" r:id="rId17"/>
   </p:sldIdLst>
   <p:sldSz cx="12191695" cy="6858000" type="screen4x3"/>
   <p:notesSz cx="6858000" cy="9144000"/>
@@ -3378,6 +3380,424 @@
 </p:sld>
 </file>
 
+<file path=ppt/slides/slide10.xml><?xml version="1.0" encoding="utf-8"?>
+<p:sld xmlns:a="http://schemas.openxmlformats.org/drawingml/2006/main" xmlns:p="http://schemas.openxmlformats.org/presentationml/2006/main" xmlns:r="http://schemas.openxmlformats.org/officeDocument/2006/relationships">
+  <p:cSld>
+    <p:spTree>
+      <p:nvGrpSpPr>
+        <p:cNvPr id="1" name=""/>
+        <p:cNvGrpSpPr/>
+        <p:nvPr/>
+      </p:nvGrpSpPr>
+      <p:grpSpPr/>
+      <p:sp>
+        <p:nvSpPr>
+          <p:cNvPr id="2" name="Rectangle 1"/>
+          <p:cNvSpPr/>
+          <p:nvPr/>
+        </p:nvSpPr>
+        <p:spPr>
+          <a:xfrm>
+            <a:off x="0" y="0"/>
+            <a:ext cx="12191695" cy="164592"/>
+          </a:xfrm>
+          <a:prstGeom prst="rect">
+            <a:avLst/>
+          </a:prstGeom>
+          <a:solidFill>
+            <a:srgbClr val="0E7490"/>
+          </a:solidFill>
+          <a:ln>
+            <a:noFill/>
+          </a:ln>
+        </p:spPr>
+        <p:style>
+          <a:lnRef idx="1">
+            <a:schemeClr val="accent1"/>
+          </a:lnRef>
+          <a:fillRef idx="3">
+            <a:schemeClr val="accent1"/>
+          </a:fillRef>
+          <a:effectRef idx="2">
+            <a:schemeClr val="accent1"/>
+          </a:effectRef>
+          <a:fontRef idx="minor">
+            <a:schemeClr val="lt1"/>
+          </a:fontRef>
+        </p:style>
+        <p:txBody>
+          <a:bodyPr rtlCol="0" anchor="ctr"/>
+          <a:lstStyle/>
+          <a:p>
+            <a:pPr algn="ctr"/>
+          </a:p>
+        </p:txBody>
+      </p:sp>
+      <p:sp>
+        <p:nvSpPr>
+          <p:cNvPr id="3" name="Rectangle 2"/>
+          <p:cNvSpPr/>
+          <p:nvPr/>
+        </p:nvSpPr>
+        <p:spPr>
+          <a:xfrm>
+            <a:off x="0" y="6473952"/>
+            <a:ext cx="12191695" cy="384048"/>
+          </a:xfrm>
+          <a:prstGeom prst="rect">
+            <a:avLst/>
+          </a:prstGeom>
+          <a:solidFill>
+            <a:srgbClr val="0F172A"/>
+          </a:solidFill>
+          <a:ln>
+            <a:noFill/>
+          </a:ln>
+        </p:spPr>
+        <p:style>
+          <a:lnRef idx="1">
+            <a:schemeClr val="accent1"/>
+          </a:lnRef>
+          <a:fillRef idx="3">
+            <a:schemeClr val="accent1"/>
+          </a:fillRef>
+          <a:effectRef idx="2">
+            <a:schemeClr val="accent1"/>
+          </a:effectRef>
+          <a:fontRef idx="minor">
+            <a:schemeClr val="lt1"/>
+          </a:fontRef>
+        </p:style>
+        <p:txBody>
+          <a:bodyPr rtlCol="0" anchor="ctr"/>
+          <a:lstStyle/>
+          <a:p>
+            <a:pPr algn="ctr"/>
+          </a:p>
+        </p:txBody>
+      </p:sp>
+      <p:sp>
+        <p:nvSpPr>
+          <p:cNvPr id="4" name="TextBox 3"/>
+          <p:cNvSpPr txBox="1"/>
+          <p:nvPr/>
+        </p:nvSpPr>
+        <p:spPr>
+          <a:xfrm>
+            <a:off x="502920" y="320040"/>
+            <a:ext cx="11155680" cy="640080"/>
+          </a:xfrm>
+          <a:prstGeom prst="rect">
+            <a:avLst/>
+          </a:prstGeom>
+          <a:noFill/>
+        </p:spPr>
+        <p:txBody>
+          <a:bodyPr wrap="none">
+            <a:spAutoFit/>
+          </a:bodyPr>
+          <a:lstStyle/>
+          <a:p>
+            <a:r>
+              <a:rPr sz="2800" b="1">
+                <a:solidFill>
+                  <a:srgbClr val="0F172A"/>
+                </a:solidFill>
+                <a:latin typeface="Calibri"/>
+              </a:rPr>
+              <a:t>7) Conclusion</a:t>
+            </a:r>
+          </a:p>
+        </p:txBody>
+      </p:sp>
+      <p:sp>
+        <p:nvSpPr>
+          <p:cNvPr id="5" name="TextBox 4"/>
+          <p:cNvSpPr txBox="1"/>
+          <p:nvPr/>
+        </p:nvSpPr>
+        <p:spPr>
+          <a:xfrm>
+            <a:off x="640080" y="1051560"/>
+            <a:ext cx="10972800" cy="4937760"/>
+          </a:xfrm>
+          <a:prstGeom prst="rect">
+            <a:avLst/>
+          </a:prstGeom>
+          <a:noFill/>
+        </p:spPr>
+        <p:txBody>
+          <a:bodyPr wrap="square">
+            <a:spAutoFit/>
+          </a:bodyPr>
+          <a:lstStyle/>
+          <a:p>
+            <a:pPr>
+              <a:spcAft>
+                <a:spcPts val="1000"/>
+              </a:spcAft>
+            </a:pPr>
+            <a:r>
+              <a:rPr sz="1800" b="0">
+                <a:solidFill>
+                  <a:srgbClr val="334155"/>
+                </a:solidFill>
+                <a:latin typeface="Calibri"/>
+              </a:rPr>
+              <a:t>•  Heart-disease labels in this table cluster with chest-pain type, ST depression, exercise angina, vessel counts, and max heart rate. Prevention should target those markers plus blood pressure and cholesterol, with sex-aware screening rather than a single threshold.</a:t>
+            </a:r>
+          </a:p>
+        </p:txBody>
+      </p:sp>
+    </p:spTree>
+  </p:cSld>
+  <p:clrMapOvr>
+    <a:masterClrMapping/>
+  </p:clrMapOvr>
+</p:sld>
+</file>
+
+<file path=ppt/slides/slide11.xml><?xml version="1.0" encoding="utf-8"?>
+<p:sld xmlns:a="http://schemas.openxmlformats.org/drawingml/2006/main" xmlns:p="http://schemas.openxmlformats.org/presentationml/2006/main" xmlns:r="http://schemas.openxmlformats.org/officeDocument/2006/relationships">
+  <p:cSld>
+    <p:spTree>
+      <p:nvGrpSpPr>
+        <p:cNvPr id="1" name=""/>
+        <p:cNvGrpSpPr/>
+        <p:nvPr/>
+      </p:nvGrpSpPr>
+      <p:grpSpPr/>
+      <p:sp>
+        <p:nvSpPr>
+          <p:cNvPr id="2" name="Rectangle 1"/>
+          <p:cNvSpPr/>
+          <p:nvPr/>
+        </p:nvSpPr>
+        <p:spPr>
+          <a:xfrm>
+            <a:off x="0" y="0"/>
+            <a:ext cx="12191695" cy="164592"/>
+          </a:xfrm>
+          <a:prstGeom prst="rect">
+            <a:avLst/>
+          </a:prstGeom>
+          <a:solidFill>
+            <a:srgbClr val="0E7490"/>
+          </a:solidFill>
+          <a:ln>
+            <a:noFill/>
+          </a:ln>
+        </p:spPr>
+        <p:style>
+          <a:lnRef idx="1">
+            <a:schemeClr val="accent1"/>
+          </a:lnRef>
+          <a:fillRef idx="3">
+            <a:schemeClr val="accent1"/>
+          </a:fillRef>
+          <a:effectRef idx="2">
+            <a:schemeClr val="accent1"/>
+          </a:effectRef>
+          <a:fontRef idx="minor">
+            <a:schemeClr val="lt1"/>
+          </a:fontRef>
+        </p:style>
+        <p:txBody>
+          <a:bodyPr rtlCol="0" anchor="ctr"/>
+          <a:lstStyle/>
+          <a:p>
+            <a:pPr algn="ctr"/>
+          </a:p>
+        </p:txBody>
+      </p:sp>
+      <p:sp>
+        <p:nvSpPr>
+          <p:cNvPr id="3" name="Rectangle 2"/>
+          <p:cNvSpPr/>
+          <p:nvPr/>
+        </p:nvSpPr>
+        <p:spPr>
+          <a:xfrm>
+            <a:off x="0" y="6473952"/>
+            <a:ext cx="12191695" cy="384048"/>
+          </a:xfrm>
+          <a:prstGeom prst="rect">
+            <a:avLst/>
+          </a:prstGeom>
+          <a:solidFill>
+            <a:srgbClr val="0F172A"/>
+          </a:solidFill>
+          <a:ln>
+            <a:noFill/>
+          </a:ln>
+        </p:spPr>
+        <p:style>
+          <a:lnRef idx="1">
+            <a:schemeClr val="accent1"/>
+          </a:lnRef>
+          <a:fillRef idx="3">
+            <a:schemeClr val="accent1"/>
+          </a:fillRef>
+          <a:effectRef idx="2">
+            <a:schemeClr val="accent1"/>
+          </a:effectRef>
+          <a:fontRef idx="minor">
+            <a:schemeClr val="lt1"/>
+          </a:fontRef>
+        </p:style>
+        <p:txBody>
+          <a:bodyPr rtlCol="0" anchor="ctr"/>
+          <a:lstStyle/>
+          <a:p>
+            <a:pPr algn="ctr"/>
+          </a:p>
+        </p:txBody>
+      </p:sp>
+      <p:sp>
+        <p:nvSpPr>
+          <p:cNvPr id="4" name="TextBox 3"/>
+          <p:cNvSpPr txBox="1"/>
+          <p:nvPr/>
+        </p:nvSpPr>
+        <p:spPr>
+          <a:xfrm>
+            <a:off x="502920" y="320040"/>
+            <a:ext cx="11155680" cy="640080"/>
+          </a:xfrm>
+          <a:prstGeom prst="rect">
+            <a:avLst/>
+          </a:prstGeom>
+          <a:noFill/>
+        </p:spPr>
+        <p:txBody>
+          <a:bodyPr wrap="none">
+            <a:spAutoFit/>
+          </a:bodyPr>
+          <a:lstStyle/>
+          <a:p>
+            <a:r>
+              <a:rPr sz="2800" b="1">
+                <a:solidFill>
+                  <a:srgbClr val="0F172A"/>
+                </a:solidFill>
+                <a:latin typeface="Calibri"/>
+              </a:rPr>
+              <a:t>8) Recommendations</a:t>
+            </a:r>
+          </a:p>
+        </p:txBody>
+      </p:sp>
+      <p:sp>
+        <p:nvSpPr>
+          <p:cNvPr id="5" name="TextBox 4"/>
+          <p:cNvSpPr txBox="1"/>
+          <p:nvPr/>
+        </p:nvSpPr>
+        <p:spPr>
+          <a:xfrm>
+            <a:off x="640080" y="1051560"/>
+            <a:ext cx="10972800" cy="4937760"/>
+          </a:xfrm>
+          <a:prstGeom prst="rect">
+            <a:avLst/>
+          </a:prstGeom>
+          <a:noFill/>
+        </p:spPr>
+        <p:txBody>
+          <a:bodyPr wrap="square">
+            <a:spAutoFit/>
+          </a:bodyPr>
+          <a:lstStyle/>
+          <a:p>
+            <a:pPr>
+              <a:spcAft>
+                <a:spcPts val="1000"/>
+              </a:spcAft>
+            </a:pPr>
+            <a:r>
+              <a:rPr sz="1800" b="0">
+                <a:solidFill>
+                  <a:srgbClr val="334155"/>
+                </a:solidFill>
+                <a:latin typeface="Calibri"/>
+              </a:rPr>
+              <a:t>•  Flag patients with typical high-risk combinations (chest pain + exang + elevated oldpeak/ca) for faster cardiology review.</a:t>
+            </a:r>
+          </a:p>
+          <a:p>
+            <a:pPr>
+              <a:spcAft>
+                <a:spcPts val="1000"/>
+              </a:spcAft>
+            </a:pPr>
+            <a:r>
+              <a:rPr sz="1800" b="0">
+                <a:solidFill>
+                  <a:srgbClr val="334155"/>
+                </a:solidFill>
+                <a:latin typeface="Calibri"/>
+              </a:rPr>
+              <a:t>•  Pair lipid and blood-pressure programs with the age groups that dominate the cohort.</a:t>
+            </a:r>
+          </a:p>
+          <a:p>
+            <a:pPr>
+              <a:spcAft>
+                <a:spcPts val="1000"/>
+              </a:spcAft>
+            </a:pPr>
+            <a:r>
+              <a:rPr sz="1800" b="0">
+                <a:solidFill>
+                  <a:srgbClr val="334155"/>
+                </a:solidFill>
+                <a:latin typeface="Calibri"/>
+              </a:rPr>
+              <a:t>•  Do not treat fasting blood sugar alone as a sufficient screen; combine it with exercise ECG markers.</a:t>
+            </a:r>
+          </a:p>
+          <a:p>
+            <a:pPr>
+              <a:spcAft>
+                <a:spcPts val="1000"/>
+              </a:spcAft>
+            </a:pPr>
+            <a:r>
+              <a:rPr sz="1800" b="0">
+                <a:solidFill>
+                  <a:srgbClr val="334155"/>
+                </a:solidFill>
+                <a:latin typeface="Calibri"/>
+              </a:rPr>
+              <a:t>•  Keep any predictive score as a triage aid; document consent, purpose limitation, and audit of errors.</a:t>
+            </a:r>
+          </a:p>
+          <a:p>
+            <a:pPr>
+              <a:spcAft>
+                <a:spcPts val="1000"/>
+              </a:spcAft>
+            </a:pPr>
+            <a:r>
+              <a:rPr sz="1800" b="0">
+                <a:solidFill>
+                  <a:srgbClr val="334155"/>
+                </a:solidFill>
+                <a:latin typeface="Calibri"/>
+              </a:rPr>
+              <a:t>•  Collaborate with clinicians to recode features and refresh the model as new labeled visits arrive.</a:t>
+            </a:r>
+          </a:p>
+        </p:txBody>
+      </p:sp>
+    </p:spTree>
+  </p:cSld>
+  <p:clrMapOvr>
+    <a:masterClrMapping/>
+  </p:clrMapOvr>
+</p:sld>
+</file>
+
 <file path=ppt/slides/slide2.xml><?xml version="1.0" encoding="utf-8"?>
 <p:sld xmlns:a="http://schemas.openxmlformats.org/drawingml/2006/main" xmlns:p="http://schemas.openxmlformats.org/presentationml/2006/main" xmlns:r="http://schemas.openxmlformats.org/officeDocument/2006/relationships">
   <p:cSld>
@@ -4236,6 +4656,22 @@
               <a:t>•  features: ['age', 'sex', 'cp', 'trestbps', 'chol', 'fbs', 'restecg', 'thalach', 'exang', 'oldpeak', 'slope', 'ca', 'thal']</a:t>
             </a:r>
           </a:p>
+          <a:p>
+            <a:pPr>
+              <a:spcAft>
+                <a:spcPts val="1000"/>
+              </a:spcAft>
+            </a:pPr>
+            <a:r>
+              <a:rPr sz="1800" b="0">
+                <a:solidFill>
+                  <a:srgbClr val="334155"/>
+                </a:solidFill>
+                <a:latin typeface="Calibri"/>
+              </a:rPr>
+              <a:t>•  Data dictionary: see docs/CASE_STUDY.md</a:t>
+            </a:r>
+          </a:p>
         </p:txBody>
       </p:sp>
     </p:spTree>
@@ -4371,114 +4807,107 @@
                 </a:solidFill>
                 <a:latin typeface="Calibri"/>
               </a:rPr>
-              <a:t>5) Key Findings</a:t>
-            </a:r>
-          </a:p>
-        </p:txBody>
-      </p:sp>
-      <p:sp>
-        <p:nvSpPr>
-          <p:cNvPr id="5" name="TextBox 4"/>
-          <p:cNvSpPr txBox="1"/>
+              <a:t>4) Data Overview — charts</a:t>
+            </a:r>
+          </a:p>
+        </p:txBody>
+      </p:sp>
+      <p:pic>
+        <p:nvPicPr>
+          <p:cNvPr id="5" name="Picture 4" descr="01_age_by_target.png"/>
+          <p:cNvPicPr>
+            <a:picLocks noChangeAspect="1"/>
+          </p:cNvPicPr>
           <p:nvPr/>
-        </p:nvSpPr>
-        <p:spPr>
-          <a:xfrm>
-            <a:off x="640080" y="1051560"/>
-            <a:ext cx="10972800" cy="4937760"/>
+        </p:nvPicPr>
+        <p:blipFill>
+          <a:blip r:embed="rId2"/>
+          <a:stretch>
+            <a:fillRect/>
+          </a:stretch>
+        </p:blipFill>
+        <p:spPr>
+          <a:xfrm>
+            <a:off x="502920" y="1051560"/>
+            <a:ext cx="5394960" cy="2863812"/>
           </a:xfrm>
           <a:prstGeom prst="rect">
             <a:avLst/>
           </a:prstGeom>
-          <a:noFill/>
-        </p:spPr>
-        <p:txBody>
-          <a:bodyPr wrap="square">
-            <a:spAutoFit/>
-          </a:bodyPr>
-          <a:lstStyle/>
-          <a:p>
-            <a:pPr>
-              <a:spcAft>
-                <a:spcPts val="1000"/>
-              </a:spcAft>
-            </a:pPr>
-            <a:r>
-              <a:rPr sz="1800" b="0">
-                <a:solidFill>
-                  <a:srgbClr val="334155"/>
-                </a:solidFill>
-                <a:latin typeface="Calibri"/>
-              </a:rPr>
-              <a:t>•  After cleaning, disease prevalence is 54.3% of unique patient rows.</a:t>
-            </a:r>
-          </a:p>
-          <a:p>
-            <a:pPr>
-              <a:spcAft>
-                <a:spcPts val="1000"/>
-              </a:spcAft>
-            </a:pPr>
-            <a:r>
-              <a:rPr sz="1800" b="0">
-                <a:solidFill>
-                  <a:srgbClr val="334155"/>
-                </a:solidFill>
-                <a:latin typeface="Calibri"/>
-              </a:rPr>
-              <a:t>•  Mean age is 54.4 years; the cohort is mixed but typically middle-to-older adult.</a:t>
-            </a:r>
-          </a:p>
-          <a:p>
-            <a:pPr>
-              <a:spcAft>
-                <a:spcPts val="1000"/>
-              </a:spcAft>
-            </a:pPr>
-            <a:r>
-              <a:rPr sz="1800" b="0">
-                <a:solidFill>
-                  <a:srgbClr val="334155"/>
-                </a:solidFill>
-                <a:latin typeface="Calibri"/>
-              </a:rPr>
-              <a:t>•  The strongest numeric association with diagnosis in this extract is exang (r=-0.44).</a:t>
-            </a:r>
-          </a:p>
-          <a:p>
-            <a:pPr>
-              <a:spcAft>
-                <a:spcPts val="1000"/>
-              </a:spcAft>
-            </a:pPr>
-            <a:r>
-              <a:rPr sz="1800" b="0">
-                <a:solidFill>
-                  <a:srgbClr val="334155"/>
-                </a:solidFill>
-                <a:latin typeface="Calibri"/>
-              </a:rPr>
-              <a:t>•  Exercise angina share is 32.8%; max heart rate averages differ by angina status.</a:t>
-            </a:r>
-          </a:p>
-          <a:p>
-            <a:pPr>
-              <a:spcAft>
-                <a:spcPts val="1000"/>
-              </a:spcAft>
-            </a:pPr>
-            <a:r>
-              <a:rPr sz="1800" b="0">
-                <a:solidFill>
-                  <a:srgbClr val="334155"/>
-                </a:solidFill>
-                <a:latin typeface="Calibri"/>
-              </a:rPr>
-              <a:t>•  A simple logistic model reaches AUC 0.86 on unseen rows — useful for ranking risk, not replacing ECG/clinical judgment.</a:t>
-            </a:r>
-          </a:p>
-        </p:txBody>
-      </p:sp>
+        </p:spPr>
+      </p:pic>
+      <p:pic>
+        <p:nvPicPr>
+          <p:cNvPr id="6" name="Picture 5" descr="02_sex_target.png"/>
+          <p:cNvPicPr>
+            <a:picLocks noChangeAspect="1"/>
+          </p:cNvPicPr>
+          <p:nvPr/>
+        </p:nvPicPr>
+        <p:blipFill>
+          <a:blip r:embed="rId3"/>
+          <a:stretch>
+            <a:fillRect/>
+          </a:stretch>
+        </p:blipFill>
+        <p:spPr>
+          <a:xfrm>
+            <a:off x="6263640" y="1051560"/>
+            <a:ext cx="5394960" cy="2865733"/>
+          </a:xfrm>
+          <a:prstGeom prst="rect">
+            <a:avLst/>
+          </a:prstGeom>
+        </p:spPr>
+      </p:pic>
+      <p:pic>
+        <p:nvPicPr>
+          <p:cNvPr id="7" name="Picture 6" descr="03_correlation.png"/>
+          <p:cNvPicPr>
+            <a:picLocks noChangeAspect="1"/>
+          </p:cNvPicPr>
+          <p:nvPr/>
+        </p:nvPicPr>
+        <p:blipFill>
+          <a:blip r:embed="rId4"/>
+          <a:stretch>
+            <a:fillRect/>
+          </a:stretch>
+        </p:blipFill>
+        <p:spPr>
+          <a:xfrm>
+            <a:off x="502920" y="3703320"/>
+            <a:ext cx="5394960" cy="3017973"/>
+          </a:xfrm>
+          <a:prstGeom prst="rect">
+            <a:avLst/>
+          </a:prstGeom>
+        </p:spPr>
+      </p:pic>
+      <p:pic>
+        <p:nvPicPr>
+          <p:cNvPr id="8" name="Picture 7" descr="04_chest_pain.png"/>
+          <p:cNvPicPr>
+            <a:picLocks noChangeAspect="1"/>
+          </p:cNvPicPr>
+          <p:nvPr/>
+        </p:nvPicPr>
+        <p:blipFill>
+          <a:blip r:embed="rId5"/>
+          <a:stretch>
+            <a:fillRect/>
+          </a:stretch>
+        </p:blipFill>
+        <p:spPr>
+          <a:xfrm>
+            <a:off x="6263640" y="3703320"/>
+            <a:ext cx="5394960" cy="2867657"/>
+          </a:xfrm>
+          <a:prstGeom prst="rect">
+            <a:avLst/>
+          </a:prstGeom>
+        </p:spPr>
+      </p:pic>
     </p:spTree>
   </p:cSld>
   <p:clrMapOvr>
@@ -4612,7 +5041,7 @@
                 </a:solidFill>
                 <a:latin typeface="Calibri"/>
               </a:rPr>
-              <a:t>6) Limitations</a:t>
+              <a:t>5) Key Findings</a:t>
             </a:r>
           </a:p>
         </p:txBody>
@@ -4651,7 +5080,7 @@
                 </a:solidFill>
                 <a:latin typeface="Calibri"/>
               </a:rPr>
-              <a:t>•  UCI Cleveland-style data is small, referred, and historically male-skewed.</a:t>
+              <a:t>•  After cleaning, disease prevalence is 54.3% of unique patient rows.</a:t>
             </a:r>
           </a:p>
           <a:p>
@@ -4667,7 +5096,7 @@
                 </a:solidFill>
                 <a:latin typeface="Calibri"/>
               </a:rPr>
-              <a:t>•  No follow-up time, so survival analysis is not supported despite the prompt's wording.</a:t>
+              <a:t>•  Mean age is 54.4 years; the cohort is mixed but typically middle-to-older adult.</a:t>
             </a:r>
           </a:p>
           <a:p>
@@ -4683,7 +5112,7 @@
                 </a:solidFill>
                 <a:latin typeface="Calibri"/>
               </a:rPr>
-              <a:t>•  Coding of cp/thal/ca can differ across mirrors of the dataset.</a:t>
+              <a:t>•  The strongest numeric association with diagnosis in this extract is exang (r=-0.44).</a:t>
             </a:r>
           </a:p>
           <a:p>
@@ -4699,7 +5128,7 @@
                 </a:solidFill>
                 <a:latin typeface="Calibri"/>
               </a:rPr>
-              <a:t>•  Outlier clipping and duplicate removal change counts versus the raw Kaggle file (often duplicated).</a:t>
+              <a:t>•  Exercise angina share is 32.8%; max heart rate averages differ by angina status.</a:t>
             </a:r>
           </a:p>
           <a:p>
@@ -4715,7 +5144,7 @@
                 </a:solidFill>
                 <a:latin typeface="Calibri"/>
               </a:rPr>
-              <a:t>•  Models can encode historical care bias; they must stay under clinician review and privacy controls.</a:t>
+              <a:t>•  A simple logistic model reaches AUC 0.86 on unseen rows — useful for ranking risk, not replacing ECG/clinical judgment.</a:t>
             </a:r>
           </a:p>
         </p:txBody>
@@ -4853,50 +5282,59 @@
                 </a:solidFill>
                 <a:latin typeface="Calibri"/>
               </a:rPr>
-              <a:t>7) Conclusion</a:t>
-            </a:r>
-          </a:p>
-        </p:txBody>
-      </p:sp>
-      <p:sp>
-        <p:nvSpPr>
-          <p:cNvPr id="5" name="TextBox 4"/>
-          <p:cNvSpPr txBox="1"/>
+              <a:t>5) Key Findings — charts</a:t>
+            </a:r>
+          </a:p>
+        </p:txBody>
+      </p:sp>
+      <p:pic>
+        <p:nvPicPr>
+          <p:cNvPr id="5" name="Picture 4" descr="05_thalach.png"/>
+          <p:cNvPicPr>
+            <a:picLocks noChangeAspect="1"/>
+          </p:cNvPicPr>
           <p:nvPr/>
-        </p:nvSpPr>
-        <p:spPr>
-          <a:xfrm>
-            <a:off x="640080" y="1051560"/>
-            <a:ext cx="10972800" cy="4937760"/>
+        </p:nvPicPr>
+        <p:blipFill>
+          <a:blip r:embed="rId2"/>
+          <a:stretch>
+            <a:fillRect/>
+          </a:stretch>
+        </p:blipFill>
+        <p:spPr>
+          <a:xfrm>
+            <a:off x="502920" y="1051560"/>
+            <a:ext cx="5394960" cy="2865733"/>
           </a:xfrm>
           <a:prstGeom prst="rect">
             <a:avLst/>
           </a:prstGeom>
-          <a:noFill/>
-        </p:spPr>
-        <p:txBody>
-          <a:bodyPr wrap="square">
-            <a:spAutoFit/>
-          </a:bodyPr>
-          <a:lstStyle/>
-          <a:p>
-            <a:pPr>
-              <a:spcAft>
-                <a:spcPts val="1000"/>
-              </a:spcAft>
-            </a:pPr>
-            <a:r>
-              <a:rPr sz="1800" b="0">
-                <a:solidFill>
-                  <a:srgbClr val="334155"/>
-                </a:solidFill>
-                <a:latin typeface="Calibri"/>
-              </a:rPr>
-              <a:t>•  Heart-disease labels in this table cluster with chest-pain type, ST depression, exercise angina, vessel counts, and max heart rate. Prevention should target those markers plus blood pressure and cholesterol, with sex-aware screening rather than a single threshold.</a:t>
-            </a:r>
-          </a:p>
-        </p:txBody>
-      </p:sp>
+        </p:spPr>
+      </p:pic>
+      <p:pic>
+        <p:nvPicPr>
+          <p:cNvPr id="6" name="Picture 5" descr="06_pairplot_risk.png"/>
+          <p:cNvPicPr>
+            <a:picLocks noChangeAspect="1"/>
+          </p:cNvPicPr>
+          <p:nvPr/>
+        </p:nvPicPr>
+        <p:blipFill>
+          <a:blip r:embed="rId3"/>
+          <a:stretch>
+            <a:fillRect/>
+          </a:stretch>
+        </p:blipFill>
+        <p:spPr>
+          <a:xfrm>
+            <a:off x="6263640" y="1051560"/>
+            <a:ext cx="5394960" cy="4955027"/>
+          </a:xfrm>
+          <a:prstGeom prst="rect">
+            <a:avLst/>
+          </a:prstGeom>
+        </p:spPr>
+      </p:pic>
     </p:spTree>
   </p:cSld>
   <p:clrMapOvr>
@@ -5030,7 +5468,7 @@
                 </a:solidFill>
                 <a:latin typeface="Calibri"/>
               </a:rPr>
-              <a:t>8) Recommendations</a:t>
+              <a:t>6) Limitations</a:t>
             </a:r>
           </a:p>
         </p:txBody>
@@ -5069,7 +5507,7 @@
                 </a:solidFill>
                 <a:latin typeface="Calibri"/>
               </a:rPr>
-              <a:t>•  Flag patients with typical high-risk combinations (chest pain + exang + elevated oldpeak/ca) for faster cardiology review.</a:t>
+              <a:t>•  UCI Cleveland-style data is small, referred, and historically male-skewed.</a:t>
             </a:r>
           </a:p>
           <a:p>
@@ -5085,7 +5523,7 @@
                 </a:solidFill>
                 <a:latin typeface="Calibri"/>
               </a:rPr>
-              <a:t>•  Pair lipid and blood-pressure programs with the age groups that dominate the cohort.</a:t>
+              <a:t>•  No follow-up time, so survival analysis is not supported despite the prompt's wording.</a:t>
             </a:r>
           </a:p>
           <a:p>
@@ -5101,7 +5539,7 @@
                 </a:solidFill>
                 <a:latin typeface="Calibri"/>
               </a:rPr>
-              <a:t>•  Do not treat fasting blood sugar alone as a sufficient screen; combine it with exercise ECG markers.</a:t>
+              <a:t>•  Coding of cp/thal/ca can differ across mirrors of the dataset.</a:t>
             </a:r>
           </a:p>
           <a:p>
@@ -5117,7 +5555,7 @@
                 </a:solidFill>
                 <a:latin typeface="Calibri"/>
               </a:rPr>
-              <a:t>•  Keep any predictive score as a triage aid; document consent, purpose limitation, and audit of errors.</a:t>
+              <a:t>•  Outlier clipping and duplicate removal change counts versus the raw Kaggle file (often duplicated).</a:t>
             </a:r>
           </a:p>
           <a:p>
@@ -5133,7 +5571,7 @@
                 </a:solidFill>
                 <a:latin typeface="Calibri"/>
               </a:rPr>
-              <a:t>•  Collaborate with clinicians to recode features and refresh the model as new labeled visits arrive.</a:t>
+              <a:t>•  Models can encode historical care bias; they must stay under clinician review and privacy controls.</a:t>
             </a:r>
           </a:p>
         </p:txBody>
